--- a/docs/adr-033-decks/mentible-for-medical-students.pptx
+++ b/docs/adr-033-decks/mentible-for-medical-students.pptx
@@ -7903,7 +7903,7 @@
         <p:spPr>
           <a:xfrm>
             <a:off x="1371600" y="1207007"/>
-            <a:ext cx="5705856" cy="502920"/>
+            <a:ext cx="5413248" cy="502920"/>
           </a:xfrm>
           <a:prstGeom prst="roundRect">
             <a:avLst>
@@ -7977,7 +7977,7 @@
                 </a:solidFill>
                 <a:latin typeface="Georgia"/>
               </a:rPr>
-              <a:t>No sign-up. Nothing leaves your laptop.</a:t>
+              <a:t>No sign-up. Start on your own device.</a:t>
             </a:r>
           </a:p>
         </p:txBody>
@@ -8016,7 +8016,7 @@
                 </a:solidFill>
                 <a:latin typeface="Calibri"/>
               </a:rPr>
-              <a:t>Install me, point me at your course material, and we start — everything stays on your own device.</a:t>
+              <a:t>Install me, point me at your course material, and we start — your library stays on your own device.</a:t>
             </a:r>
           </a:p>
         </p:txBody>
@@ -8607,16 +8607,16 @@
                 </a:solidFill>
                 <a:latin typeface="Calibri"/>
               </a:rPr>
-              <a:t>✔ On the free tier I live entirely on your device. </a:t>
+              <a:t>✔ Free tier: your notes stay on your device. </a:t>
             </a:r>
             <a:r>
-              <a:rPr sz="1250" b="0" i="0">
+              <a:rPr sz="1150" b="0" i="0">
                 <a:solidFill>
                   <a:srgbClr val="21302B"/>
                 </a:solidFill>
                 <a:latin typeface="Calibri"/>
               </a:rPr>
-              <a:t>I can't see your library — and neither can anyone else.</a:t>
+              <a:t>When you ask, the relevant passage is sent to the AI to draft — used once, not stored by us.</a:t>
             </a:r>
           </a:p>
         </p:txBody>

--- a/docs/adr-033-decks/mentible-for-medical-students.pptx
+++ b/docs/adr-033-decks/mentible-for-medical-students.pptx
@@ -4790,6 +4790,102 @@
                 <a:latin typeface="Calibri"/>
               </a:rPr>
               <a:t>  ·  second-year medical student</a:t>
+            </a:r>
+          </a:p>
+        </p:txBody>
+      </p:sp>
+      <p:sp>
+        <p:nvSpPr>
+          <p:cNvPr id="41" name="Rounded Rectangle 40"/>
+          <p:cNvSpPr/>
+          <p:nvPr/>
+        </p:nvSpPr>
+        <p:spPr>
+          <a:xfrm>
+            <a:off x="1417320" y="6126480"/>
+            <a:ext cx="10058400" cy="502920"/>
+          </a:xfrm>
+          <a:prstGeom prst="roundRect">
+            <a:avLst>
+              <a:gd name="adj" fmla="val 30000"/>
+            </a:avLst>
+          </a:prstGeom>
+          <a:solidFill>
+            <a:srgbClr val="E6F1EB"/>
+          </a:solidFill>
+          <a:ln w="12700">
+            <a:solidFill>
+              <a:srgbClr val="BFDDCB"/>
+            </a:solidFill>
+          </a:ln>
+          <a:effectLst/>
+        </p:spPr>
+        <p:style>
+          <a:lnRef idx="1">
+            <a:schemeClr val="accent1"/>
+          </a:lnRef>
+          <a:fillRef idx="3">
+            <a:schemeClr val="accent1"/>
+          </a:fillRef>
+          <a:effectRef idx="2">
+            <a:schemeClr val="accent1"/>
+          </a:effectRef>
+          <a:fontRef idx="minor">
+            <a:schemeClr val="lt1"/>
+          </a:fontRef>
+        </p:style>
+        <p:txBody>
+          <a:bodyPr rtlCol="0" anchor="ctr"/>
+          <a:lstStyle/>
+          <a:p>
+            <a:pPr algn="ctr"/>
+          </a:p>
+        </p:txBody>
+      </p:sp>
+      <p:sp>
+        <p:nvSpPr>
+          <p:cNvPr id="42" name="TextBox 41"/>
+          <p:cNvSpPr txBox="1"/>
+          <p:nvPr/>
+        </p:nvSpPr>
+        <p:spPr>
+          <a:xfrm>
+            <a:off x="1691640" y="6126480"/>
+            <a:ext cx="9601200" cy="502920"/>
+          </a:xfrm>
+          <a:prstGeom prst="rect">
+            <a:avLst/>
+          </a:prstGeom>
+          <a:noFill/>
+        </p:spPr>
+        <p:txBody>
+          <a:bodyPr wrap="square" anchor="ctr" lIns="0" rIns="0" tIns="0" bIns="0">
+            <a:spAutoFit/>
+          </a:bodyPr>
+          <a:lstStyle/>
+          <a:p>
+            <a:pPr algn="l">
+              <a:spcAft>
+                <a:spcPts val="0"/>
+              </a:spcAft>
+            </a:pPr>
+            <a:r>
+              <a:rPr sz="1050" b="1" i="0">
+                <a:solidFill>
+                  <a:srgbClr val="2E7D5B"/>
+                </a:solidFill>
+                <a:latin typeface="Consolas"/>
+              </a:rPr>
+              <a:t>◆ PRODUCT VISION — </a:t>
+            </a:r>
+            <a:r>
+              <a:rPr sz="1050" b="0" i="0">
+                <a:solidFill>
+                  <a:srgbClr val="21302B"/>
+                </a:solidFill>
+                <a:latin typeface="Calibri"/>
+              </a:rPr>
+              <a:t>a preview of where Mentible is headed. The grounded AI and private hosted sync shown here are on the roadmap (ADR-029/033), not yet shipped.</a:t>
             </a:r>
           </a:p>
         </p:txBody>
